--- a/classes/parte-14-grc-riesgo-y-cumplimiento/286-concienciacion-y-cultura-de-seguridad/clase-286-presentacion.pptx
+++ b/classes/parte-14-grc-riesgo-y-cumplimiento/286-concienciacion-y-cultura-de-seguridad/clase-286-presentacion.pptx
@@ -17,6 +17,10 @@
     <p:sldId id="265" r:id="rId16"/>
     <p:sldId id="266" r:id="rId17"/>
     <p:sldId id="267" r:id="rId18"/>
+    <p:sldId id="268" r:id="rId19"/>
+    <p:sldId id="269" r:id="rId20"/>
+    <p:sldId id="270" r:id="rId21"/>
+    <p:sldId id="271" r:id="rId22"/>
   </p:sldIdLst>
   <p:sldSz cx="9144000" cy="6858000" type="screen4x3"/>
   <p:notesSz cx="6858000" cy="9144000"/>
@@ -3198,7 +3202,7 @@
                   <a:srgbClr val="0B3D2E"/>
                 </a:solidFill>
               </a:rPr>
-              <a:t>⚠️ Errores comunes</a:t>
+              <a:t>🧪 Laboratorio guiado (ejercicio aplicado)</a:t>
             </a:r>
           </a:p>
         </p:txBody>
@@ -3236,67 +3240,97 @@
                   <a:srgbClr val="22282E"/>
                 </a:solidFill>
               </a:rPr>
-              <a:t>•  Un único curso anual "para cumplir" — No cambia hábitos; usa refuerzo continuo y variado</a:t>
-            </a:r>
-          </a:p>
-          <a:p>
-            <a:pPr>
-              <a:spcAft>
-                <a:spcPts val="600"/>
-              </a:spcAft>
-            </a:pPr>
-            <a:r>
-              <a:rPr sz="1500">
-                <a:solidFill>
-                  <a:srgbClr val="22282E"/>
-                </a:solidFill>
-              </a:rPr>
-              <a:t>•  Simulaciones que humillan o castigan — Generan miedo y ocultación; enfoque educativo y positivo</a:t>
-            </a:r>
-          </a:p>
-          <a:p>
-            <a:pPr>
-              <a:spcAft>
-                <a:spcPts val="600"/>
-              </a:spcAft>
-            </a:pPr>
-            <a:r>
-              <a:rPr sz="1500">
-                <a:solidFill>
-                  <a:srgbClr val="22282E"/>
-                </a:solidFill>
-              </a:rPr>
-              <a:t>•  Medir solo asistencia — No mide comportamiento; usa clic y reporte</a:t>
-            </a:r>
-          </a:p>
-          <a:p>
-            <a:pPr>
-              <a:spcAft>
-                <a:spcPts val="600"/>
-              </a:spcAft>
-            </a:pPr>
-            <a:r>
-              <a:rPr sz="1500">
-                <a:solidFill>
-                  <a:srgbClr val="22282E"/>
-                </a:solidFill>
-              </a:rPr>
-              <a:t>•  Mismo contenido para todos — Ineficaz; segmenta por rol y riesgo</a:t>
-            </a:r>
-          </a:p>
-          <a:p>
-            <a:pPr>
-              <a:spcAft>
-                <a:spcPts val="600"/>
-              </a:spcAft>
-            </a:pPr>
-            <a:r>
-              <a:rPr sz="1500">
-                <a:solidFill>
-                  <a:srgbClr val="22282E"/>
-                </a:solidFill>
-              </a:rPr>
-              <a:t>•  Enviar simulaciones a terceros sin permiso — Problema ético y legal; solo empleados propios con aprobación</a:t>
+              <a:t>•  Parte A — Programa de concienciación para "Ferretería del Sur S.A.":</a:t>
+            </a:r>
+          </a:p>
+          <a:p>
+            <a:pPr>
+              <a:spcAft>
+                <a:spcPts val="600"/>
+              </a:spcAft>
+            </a:pPr>
+            <a:r>
+              <a:rPr sz="1500">
+                <a:solidFill>
+                  <a:srgbClr val="22282E"/>
+                </a:solidFill>
+              </a:rPr>
+              <a:t>•  Segmentación: define 3 audiencias (personal general, desarrolladores, finanzas) y el riesgo principal de cada una (phishing genérico, seguridad en el código, fraude del CEO/BEC).</a:t>
+            </a:r>
+          </a:p>
+          <a:p>
+            <a:pPr>
+              <a:spcAft>
+                <a:spcPts val="600"/>
+              </a:spcAft>
+            </a:pPr>
+            <a:r>
+              <a:rPr sz="1500">
+                <a:solidFill>
+                  <a:srgbClr val="22282E"/>
+                </a:solidFill>
+              </a:rPr>
+              <a:t>•  Plan anual: crea un calendario de 12 meses con temas mensuales (contraseñas, phishing, datos personales, escritorio limpio, incidentes) y formato (píldora, taller, cartel, simulación).</a:t>
+            </a:r>
+          </a:p>
+          <a:p>
+            <a:pPr>
+              <a:spcAft>
+                <a:spcPts val="600"/>
+              </a:spcAft>
+            </a:pPr>
+            <a:r>
+              <a:rPr sz="1500">
+                <a:solidFill>
+                  <a:srgbClr val="22282E"/>
+                </a:solidFill>
+              </a:rPr>
+              <a:t>•  Contenido: redacta el guion de una píldora de 5 minutos sobre cómo reconocer un correo de phishing (remitente, urgencia, enlaces, adjuntos).</a:t>
+            </a:r>
+          </a:p>
+          <a:p>
+            <a:pPr>
+              <a:spcAft>
+                <a:spcPts val="600"/>
+              </a:spcAft>
+            </a:pPr>
+            <a:r>
+              <a:rPr sz="1500">
+                <a:solidFill>
+                  <a:srgbClr val="22282E"/>
+                </a:solidFill>
+              </a:rPr>
+              <a:t>•  Parte B — Simulación de phishing ética (laboratorio con GoPhish):</a:t>
+            </a:r>
+          </a:p>
+          <a:p>
+            <a:pPr>
+              <a:spcAft>
+                <a:spcPts val="600"/>
+              </a:spcAft>
+            </a:pPr>
+            <a:r>
+              <a:rPr sz="1500">
+                <a:solidFill>
+                  <a:srgbClr val="22282E"/>
+                </a:solidFill>
+              </a:rPr>
+              <a:t>•  Despliega GoPhish en tu VM de laboratorio y crea una campaña con: plantilla de correo señuelo, landing page de formación y grupo de "empleados de prueba" (cuentas propias).</a:t>
+            </a:r>
+          </a:p>
+          <a:p>
+            <a:pPr>
+              <a:spcAft>
+                <a:spcPts val="600"/>
+              </a:spcAft>
+            </a:pPr>
+            <a:r>
+              <a:rPr sz="1500">
+                <a:solidFill>
+                  <a:srgbClr val="22282E"/>
+                </a:solidFill>
+              </a:rPr>
+              <a:t>•  Lanza la campaña contra tus cuentas de prueba y observa las métricas: enviados, abiertos, clics, datos enviados.</a:t>
             </a:r>
           </a:p>
         </p:txBody>
@@ -3347,7 +3381,7 @@
                   <a:srgbClr val="0B3D2E"/>
                 </a:solidFill>
               </a:rPr>
-              <a:t>❓ Preguntas frecuentes</a:t>
+              <a:t>✍️ Ejercicios</a:t>
             </a:r>
           </a:p>
         </p:txBody>
@@ -3385,97 +3419,82 @@
                   <a:srgbClr val="22282E"/>
                 </a:solidFill>
               </a:rPr>
-              <a:t>•  ❓ ¿Sirven de algo las simulaciones de phishing?</a:t>
-            </a:r>
-          </a:p>
-          <a:p>
-            <a:pPr>
-              <a:spcAft>
-                <a:spcPts val="600"/>
-              </a:spcAft>
-            </a:pPr>
-            <a:r>
-              <a:rPr sz="1500">
-                <a:solidFill>
-                  <a:srgbClr val="22282E"/>
-                </a:solidFill>
-              </a:rPr>
-              <a:t>•  Sí, si son educativas y continuas: reducen la tasa de clics y —más importante— aumentan la de reporte. Usadas como castigo, son contraproducentes.</a:t>
-            </a:r>
-          </a:p>
-          <a:p>
-            <a:pPr>
-              <a:spcAft>
-                <a:spcPts val="600"/>
-              </a:spcAft>
-            </a:pPr>
-            <a:r>
-              <a:rPr sz="1500">
-                <a:solidFill>
-                  <a:srgbClr val="22282E"/>
-                </a:solidFill>
-              </a:rPr>
-              <a:t>•  ❓ ¿Cuál es la mejor métrica?</a:t>
-            </a:r>
-          </a:p>
-          <a:p>
-            <a:pPr>
-              <a:spcAft>
-                <a:spcPts val="600"/>
-              </a:spcAft>
-            </a:pPr>
-            <a:r>
-              <a:rPr sz="1500">
-                <a:solidFill>
-                  <a:srgbClr val="22282E"/>
-                </a:solidFill>
-              </a:rPr>
-              <a:t>•  La tasa de reporte. Que la gente reconozca y denuncie un phishing es más valioso que solo evitar el clic, porque activa la respuesta a incidentes.</a:t>
-            </a:r>
-          </a:p>
-          <a:p>
-            <a:pPr>
-              <a:spcAft>
-                <a:spcPts val="600"/>
-              </a:spcAft>
-            </a:pPr>
-            <a:r>
-              <a:rPr sz="1500">
-                <a:solidFill>
-                  <a:srgbClr val="22282E"/>
-                </a:solidFill>
-              </a:rPr>
-              <a:t>•  ❓ ¿Cómo consigo apoyo de la dirección?</a:t>
-            </a:r>
-          </a:p>
-          <a:p>
-            <a:pPr>
-              <a:spcAft>
-                <a:spcPts val="600"/>
-              </a:spcAft>
-            </a:pPr>
-            <a:r>
-              <a:rPr sz="1500">
-                <a:solidFill>
-                  <a:srgbClr val="22282E"/>
-                </a:solidFill>
-              </a:rPr>
-              <a:t>•  Traduciendo el riesgo humano a números (coste de una brecha por BEC) y midiendo la mejora del comportamiento tras el programa.</a:t>
-            </a:r>
-          </a:p>
-          <a:p>
-            <a:pPr>
-              <a:spcAft>
-                <a:spcPts val="600"/>
-              </a:spcAft>
-            </a:pPr>
-            <a:r>
-              <a:rPr sz="1500">
-                <a:solidFill>
-                  <a:srgbClr val="22282E"/>
-                </a:solidFill>
-              </a:rPr>
-              <a:t>•  ❓ ¿Cada cuánto formar?</a:t>
+              <a:t>•  Diferencia con ejemplos concienciación, formación y educación.</a:t>
+            </a:r>
+          </a:p>
+          <a:p>
+            <a:pPr>
+              <a:spcAft>
+                <a:spcPts val="600"/>
+              </a:spcAft>
+            </a:pPr>
+            <a:r>
+              <a:rPr sz="1500">
+                <a:solidFill>
+                  <a:srgbClr val="22282E"/>
+                </a:solidFill>
+              </a:rPr>
+              <a:t>•  Diseña 3 señuelos de phishing de dificultad creciente (bajo, medio, dirigido/spear).</a:t>
+            </a:r>
+          </a:p>
+          <a:p>
+            <a:pPr>
+              <a:spcAft>
+                <a:spcPts val="600"/>
+              </a:spcAft>
+            </a:pPr>
+            <a:r>
+              <a:rPr sz="1500">
+                <a:solidFill>
+                  <a:srgbClr val="22282E"/>
+                </a:solidFill>
+              </a:rPr>
+              <a:t>•  Explica por qué la tasa de reporte importa más que la de clics.</a:t>
+            </a:r>
+          </a:p>
+          <a:p>
+            <a:pPr>
+              <a:spcAft>
+                <a:spcPts val="600"/>
+              </a:spcAft>
+            </a:pPr>
+            <a:r>
+              <a:rPr sz="1500">
+                <a:solidFill>
+                  <a:srgbClr val="22282E"/>
+                </a:solidFill>
+              </a:rPr>
+              <a:t>•  Propón cómo formarías específicamente al equipo de finanzas contra el fraude BEC.</a:t>
+            </a:r>
+          </a:p>
+          <a:p>
+            <a:pPr>
+              <a:spcAft>
+                <a:spcPts val="600"/>
+              </a:spcAft>
+            </a:pPr>
+            <a:r>
+              <a:rPr sz="1500">
+                <a:solidFill>
+                  <a:srgbClr val="22282E"/>
+                </a:solidFill>
+              </a:rPr>
+              <a:t>•  Un empleado picó en la simulación. Redacta el mensaje que le enviarías sin culpabilizarlo.</a:t>
+            </a:r>
+          </a:p>
+          <a:p>
+            <a:pPr>
+              <a:spcAft>
+                <a:spcPts val="600"/>
+              </a:spcAft>
+            </a:pPr>
+            <a:r>
+              <a:rPr sz="1500">
+                <a:solidFill>
+                  <a:srgbClr val="22282E"/>
+                </a:solidFill>
+              </a:rPr>
+              <a:t>•  Define 3 indicadores para medir la madurez de la cultura de seguridad.</a:t>
             </a:r>
           </a:p>
         </p:txBody>
@@ -3526,7 +3545,7 @@
                   <a:srgbClr val="0B3D2E"/>
                 </a:solidFill>
               </a:rPr>
-              <a:t>🔗 Referencias</a:t>
+              <a:t>📝 Reto verificable</a:t>
             </a:r>
           </a:p>
         </p:txBody>
@@ -3564,6 +3583,438 @@
                   <a:srgbClr val="22282E"/>
                 </a:solidFill>
               </a:rPr>
+              <a:t>•  Entrega un programa de concienciación con: segmentación por 3 audiencias, calendario anual de temas, una simulación de phishing ejecutada en laboratorio (GoPhish) con métricas de clic y reporte, y la…</a:t>
+            </a:r>
+          </a:p>
+          <a:p>
+            <a:pPr>
+              <a:spcAft>
+                <a:spcPts val="600"/>
+              </a:spcAft>
+            </a:pPr>
+            <a:r>
+              <a:rPr sz="1500">
+                <a:solidFill>
+                  <a:srgbClr val="22282E"/>
+                </a:solidFill>
+              </a:rPr>
+              <a:t>•  Criterio de aceptación: la campaña se ejecutó solo sobre cuentas de prueba propias, se registran tasas de clic y reporte iniciales con un objetivo de mejora, y el material educativo refuerza sin…</a:t>
+            </a:r>
+          </a:p>
+        </p:txBody>
+      </p:sp>
+    </p:spTree>
+  </p:cSld>
+  <p:clrMapOvr>
+    <a:masterClrMapping/>
+  </p:clrMapOvr>
+</p:sld>
+</file>
+
+<file path=ppt/slides/slide13.xml><?xml version="1.0" encoding="utf-8"?>
+<p:sld xmlns:a="http://schemas.openxmlformats.org/drawingml/2006/main" xmlns:p="http://schemas.openxmlformats.org/presentationml/2006/main" xmlns:r="http://schemas.openxmlformats.org/officeDocument/2006/relationships">
+  <p:cSld>
+    <p:spTree>
+      <p:nvGrpSpPr>
+        <p:cNvPr id="1" name=""/>
+        <p:cNvGrpSpPr/>
+        <p:nvPr/>
+      </p:nvGrpSpPr>
+      <p:grpSpPr/>
+      <p:sp>
+        <p:nvSpPr>
+          <p:cNvPr id="2" name="TextBox 1"/>
+          <p:cNvSpPr txBox="1"/>
+          <p:nvPr/>
+        </p:nvSpPr>
+        <p:spPr>
+          <a:xfrm>
+            <a:off x="457200" y="320040"/>
+            <a:ext cx="8229600" cy="822960"/>
+          </a:xfrm>
+          <a:prstGeom prst="rect">
+            <a:avLst/>
+          </a:prstGeom>
+          <a:noFill/>
+        </p:spPr>
+        <p:txBody>
+          <a:bodyPr wrap="square">
+            <a:spAutoFit/>
+          </a:bodyPr>
+          <a:lstStyle/>
+          <a:p>
+            <a:r>
+              <a:rPr sz="2600" b="1">
+                <a:solidFill>
+                  <a:srgbClr val="0B3D2E"/>
+                </a:solidFill>
+              </a:rPr>
+              <a:t>⚠️ Errores comunes</a:t>
+            </a:r>
+          </a:p>
+        </p:txBody>
+      </p:sp>
+      <p:sp>
+        <p:nvSpPr>
+          <p:cNvPr id="3" name="TextBox 2"/>
+          <p:cNvSpPr txBox="1"/>
+          <p:nvPr/>
+        </p:nvSpPr>
+        <p:spPr>
+          <a:xfrm>
+            <a:off x="457200" y="1280160"/>
+            <a:ext cx="8229600" cy="4937760"/>
+          </a:xfrm>
+          <a:prstGeom prst="rect">
+            <a:avLst/>
+          </a:prstGeom>
+          <a:noFill/>
+        </p:spPr>
+        <p:txBody>
+          <a:bodyPr wrap="square">
+            <a:spAutoFit/>
+          </a:bodyPr>
+          <a:lstStyle/>
+          <a:p>
+            <a:pPr>
+              <a:spcAft>
+                <a:spcPts val="600"/>
+              </a:spcAft>
+            </a:pPr>
+            <a:r>
+              <a:rPr sz="1500">
+                <a:solidFill>
+                  <a:srgbClr val="22282E"/>
+                </a:solidFill>
+              </a:rPr>
+              <a:t>•  Un único curso anual "para cumplir" — No cambia hábitos; usa refuerzo continuo y variado</a:t>
+            </a:r>
+          </a:p>
+          <a:p>
+            <a:pPr>
+              <a:spcAft>
+                <a:spcPts val="600"/>
+              </a:spcAft>
+            </a:pPr>
+            <a:r>
+              <a:rPr sz="1500">
+                <a:solidFill>
+                  <a:srgbClr val="22282E"/>
+                </a:solidFill>
+              </a:rPr>
+              <a:t>•  Simulaciones que humillan o castigan — Generan miedo y ocultación; enfoque educativo y positivo</a:t>
+            </a:r>
+          </a:p>
+          <a:p>
+            <a:pPr>
+              <a:spcAft>
+                <a:spcPts val="600"/>
+              </a:spcAft>
+            </a:pPr>
+            <a:r>
+              <a:rPr sz="1500">
+                <a:solidFill>
+                  <a:srgbClr val="22282E"/>
+                </a:solidFill>
+              </a:rPr>
+              <a:t>•  Medir solo asistencia — No mide comportamiento; usa clic y reporte</a:t>
+            </a:r>
+          </a:p>
+          <a:p>
+            <a:pPr>
+              <a:spcAft>
+                <a:spcPts val="600"/>
+              </a:spcAft>
+            </a:pPr>
+            <a:r>
+              <a:rPr sz="1500">
+                <a:solidFill>
+                  <a:srgbClr val="22282E"/>
+                </a:solidFill>
+              </a:rPr>
+              <a:t>•  Mismo contenido para todos — Ineficaz; segmenta por rol y riesgo</a:t>
+            </a:r>
+          </a:p>
+          <a:p>
+            <a:pPr>
+              <a:spcAft>
+                <a:spcPts val="600"/>
+              </a:spcAft>
+            </a:pPr>
+            <a:r>
+              <a:rPr sz="1500">
+                <a:solidFill>
+                  <a:srgbClr val="22282E"/>
+                </a:solidFill>
+              </a:rPr>
+              <a:t>•  Enviar simulaciones a terceros sin permiso — Problema ético y legal; solo empleados propios con aprobación</a:t>
+            </a:r>
+          </a:p>
+        </p:txBody>
+      </p:sp>
+    </p:spTree>
+  </p:cSld>
+  <p:clrMapOvr>
+    <a:masterClrMapping/>
+  </p:clrMapOvr>
+</p:sld>
+</file>
+
+<file path=ppt/slides/slide14.xml><?xml version="1.0" encoding="utf-8"?>
+<p:sld xmlns:a="http://schemas.openxmlformats.org/drawingml/2006/main" xmlns:p="http://schemas.openxmlformats.org/presentationml/2006/main" xmlns:r="http://schemas.openxmlformats.org/officeDocument/2006/relationships">
+  <p:cSld>
+    <p:spTree>
+      <p:nvGrpSpPr>
+        <p:cNvPr id="1" name=""/>
+        <p:cNvGrpSpPr/>
+        <p:nvPr/>
+      </p:nvGrpSpPr>
+      <p:grpSpPr/>
+      <p:sp>
+        <p:nvSpPr>
+          <p:cNvPr id="2" name="TextBox 1"/>
+          <p:cNvSpPr txBox="1"/>
+          <p:nvPr/>
+        </p:nvSpPr>
+        <p:spPr>
+          <a:xfrm>
+            <a:off x="457200" y="320040"/>
+            <a:ext cx="8229600" cy="822960"/>
+          </a:xfrm>
+          <a:prstGeom prst="rect">
+            <a:avLst/>
+          </a:prstGeom>
+          <a:noFill/>
+        </p:spPr>
+        <p:txBody>
+          <a:bodyPr wrap="square">
+            <a:spAutoFit/>
+          </a:bodyPr>
+          <a:lstStyle/>
+          <a:p>
+            <a:r>
+              <a:rPr sz="2600" b="1">
+                <a:solidFill>
+                  <a:srgbClr val="0B3D2E"/>
+                </a:solidFill>
+              </a:rPr>
+              <a:t>❓ Preguntas frecuentes</a:t>
+            </a:r>
+          </a:p>
+        </p:txBody>
+      </p:sp>
+      <p:sp>
+        <p:nvSpPr>
+          <p:cNvPr id="3" name="TextBox 2"/>
+          <p:cNvSpPr txBox="1"/>
+          <p:nvPr/>
+        </p:nvSpPr>
+        <p:spPr>
+          <a:xfrm>
+            <a:off x="457200" y="1280160"/>
+            <a:ext cx="8229600" cy="4937760"/>
+          </a:xfrm>
+          <a:prstGeom prst="rect">
+            <a:avLst/>
+          </a:prstGeom>
+          <a:noFill/>
+        </p:spPr>
+        <p:txBody>
+          <a:bodyPr wrap="square">
+            <a:spAutoFit/>
+          </a:bodyPr>
+          <a:lstStyle/>
+          <a:p>
+            <a:pPr>
+              <a:spcAft>
+                <a:spcPts val="600"/>
+              </a:spcAft>
+            </a:pPr>
+            <a:r>
+              <a:rPr sz="1500">
+                <a:solidFill>
+                  <a:srgbClr val="22282E"/>
+                </a:solidFill>
+              </a:rPr>
+              <a:t>•  ❓ ¿Sirven de algo las simulaciones de phishing?</a:t>
+            </a:r>
+          </a:p>
+          <a:p>
+            <a:pPr>
+              <a:spcAft>
+                <a:spcPts val="600"/>
+              </a:spcAft>
+            </a:pPr>
+            <a:r>
+              <a:rPr sz="1500">
+                <a:solidFill>
+                  <a:srgbClr val="22282E"/>
+                </a:solidFill>
+              </a:rPr>
+              <a:t>•  Sí, si son educativas y continuas: reducen la tasa de clics y —más importante— aumentan la de reporte. Usadas como castigo, son contraproducentes.</a:t>
+            </a:r>
+          </a:p>
+          <a:p>
+            <a:pPr>
+              <a:spcAft>
+                <a:spcPts val="600"/>
+              </a:spcAft>
+            </a:pPr>
+            <a:r>
+              <a:rPr sz="1500">
+                <a:solidFill>
+                  <a:srgbClr val="22282E"/>
+                </a:solidFill>
+              </a:rPr>
+              <a:t>•  ❓ ¿Cuál es la mejor métrica?</a:t>
+            </a:r>
+          </a:p>
+          <a:p>
+            <a:pPr>
+              <a:spcAft>
+                <a:spcPts val="600"/>
+              </a:spcAft>
+            </a:pPr>
+            <a:r>
+              <a:rPr sz="1500">
+                <a:solidFill>
+                  <a:srgbClr val="22282E"/>
+                </a:solidFill>
+              </a:rPr>
+              <a:t>•  La tasa de reporte. Que la gente reconozca y denuncie un phishing es más valioso que solo evitar el clic, porque activa la respuesta a incidentes.</a:t>
+            </a:r>
+          </a:p>
+          <a:p>
+            <a:pPr>
+              <a:spcAft>
+                <a:spcPts val="600"/>
+              </a:spcAft>
+            </a:pPr>
+            <a:r>
+              <a:rPr sz="1500">
+                <a:solidFill>
+                  <a:srgbClr val="22282E"/>
+                </a:solidFill>
+              </a:rPr>
+              <a:t>•  ❓ ¿Cómo consigo apoyo de la dirección?</a:t>
+            </a:r>
+          </a:p>
+          <a:p>
+            <a:pPr>
+              <a:spcAft>
+                <a:spcPts val="600"/>
+              </a:spcAft>
+            </a:pPr>
+            <a:r>
+              <a:rPr sz="1500">
+                <a:solidFill>
+                  <a:srgbClr val="22282E"/>
+                </a:solidFill>
+              </a:rPr>
+              <a:t>•  Traduciendo el riesgo humano a números (coste de una brecha por BEC) y midiendo la mejora del comportamiento tras el programa.</a:t>
+            </a:r>
+          </a:p>
+          <a:p>
+            <a:pPr>
+              <a:spcAft>
+                <a:spcPts val="600"/>
+              </a:spcAft>
+            </a:pPr>
+            <a:r>
+              <a:rPr sz="1500">
+                <a:solidFill>
+                  <a:srgbClr val="22282E"/>
+                </a:solidFill>
+              </a:rPr>
+              <a:t>•  ❓ ¿Cada cuánto formar?</a:t>
+            </a:r>
+          </a:p>
+        </p:txBody>
+      </p:sp>
+    </p:spTree>
+  </p:cSld>
+  <p:clrMapOvr>
+    <a:masterClrMapping/>
+  </p:clrMapOvr>
+</p:sld>
+</file>
+
+<file path=ppt/slides/slide15.xml><?xml version="1.0" encoding="utf-8"?>
+<p:sld xmlns:a="http://schemas.openxmlformats.org/drawingml/2006/main" xmlns:p="http://schemas.openxmlformats.org/presentationml/2006/main" xmlns:r="http://schemas.openxmlformats.org/officeDocument/2006/relationships">
+  <p:cSld>
+    <p:spTree>
+      <p:nvGrpSpPr>
+        <p:cNvPr id="1" name=""/>
+        <p:cNvGrpSpPr/>
+        <p:nvPr/>
+      </p:nvGrpSpPr>
+      <p:grpSpPr/>
+      <p:sp>
+        <p:nvSpPr>
+          <p:cNvPr id="2" name="TextBox 1"/>
+          <p:cNvSpPr txBox="1"/>
+          <p:nvPr/>
+        </p:nvSpPr>
+        <p:spPr>
+          <a:xfrm>
+            <a:off x="457200" y="320040"/>
+            <a:ext cx="8229600" cy="822960"/>
+          </a:xfrm>
+          <a:prstGeom prst="rect">
+            <a:avLst/>
+          </a:prstGeom>
+          <a:noFill/>
+        </p:spPr>
+        <p:txBody>
+          <a:bodyPr wrap="square">
+            <a:spAutoFit/>
+          </a:bodyPr>
+          <a:lstStyle/>
+          <a:p>
+            <a:r>
+              <a:rPr sz="2600" b="1">
+                <a:solidFill>
+                  <a:srgbClr val="0B3D2E"/>
+                </a:solidFill>
+              </a:rPr>
+              <a:t>🔗 Referencias</a:t>
+            </a:r>
+          </a:p>
+        </p:txBody>
+      </p:sp>
+      <p:sp>
+        <p:nvSpPr>
+          <p:cNvPr id="3" name="TextBox 2"/>
+          <p:cNvSpPr txBox="1"/>
+          <p:nvPr/>
+        </p:nvSpPr>
+        <p:spPr>
+          <a:xfrm>
+            <a:off x="457200" y="1280160"/>
+            <a:ext cx="8229600" cy="4937760"/>
+          </a:xfrm>
+          <a:prstGeom prst="rect">
+            <a:avLst/>
+          </a:prstGeom>
+          <a:noFill/>
+        </p:spPr>
+        <p:txBody>
+          <a:bodyPr wrap="square">
+            <a:spAutoFit/>
+          </a:bodyPr>
+          <a:lstStyle/>
+          <a:p>
+            <a:pPr>
+              <a:spcAft>
+                <a:spcPts val="600"/>
+              </a:spcAft>
+            </a:pPr>
+            <a:r>
+              <a:rPr sz="1500">
+                <a:solidFill>
+                  <a:srgbClr val="22282E"/>
+                </a:solidFill>
+              </a:rPr>
               <a:t>•  NIST SP 800-50 Rev.1 — Building a Cybersecurity Awareness Program. &lt;https://csrc.nist.gov/pubs/sp/800/50/r1/ipd&gt;</a:t>
             </a:r>
           </a:p>
@@ -3629,6 +4080,81 @@
           </a:p>
         </p:txBody>
       </p:sp>
+    </p:spTree>
+  </p:cSld>
+  <p:clrMapOvr>
+    <a:masterClrMapping/>
+  </p:clrMapOvr>
+</p:sld>
+</file>
+
+<file path=ppt/slides/slide16.xml><?xml version="1.0" encoding="utf-8"?>
+<p:sld xmlns:a="http://schemas.openxmlformats.org/drawingml/2006/main" xmlns:p="http://schemas.openxmlformats.org/presentationml/2006/main" xmlns:r="http://schemas.openxmlformats.org/officeDocument/2006/relationships">
+  <p:cSld>
+    <p:spTree>
+      <p:nvGrpSpPr>
+        <p:cNvPr id="1" name=""/>
+        <p:cNvGrpSpPr/>
+        <p:nvPr/>
+      </p:nvGrpSpPr>
+      <p:grpSpPr/>
+      <p:sp>
+        <p:nvSpPr>
+          <p:cNvPr id="2" name="TextBox 1"/>
+          <p:cNvSpPr txBox="1"/>
+          <p:nvPr/>
+        </p:nvSpPr>
+        <p:spPr>
+          <a:xfrm>
+            <a:off x="457200" y="274320"/>
+            <a:ext cx="8229600" cy="640080"/>
+          </a:xfrm>
+          <a:prstGeom prst="rect">
+            <a:avLst/>
+          </a:prstGeom>
+          <a:noFill/>
+        </p:spPr>
+        <p:txBody>
+          <a:bodyPr wrap="square">
+            <a:spAutoFit/>
+          </a:bodyPr>
+          <a:lstStyle/>
+          <a:p>
+            <a:r>
+              <a:rPr sz="2200" b="1">
+                <a:solidFill>
+                  <a:srgbClr val="0B3D2E"/>
+                </a:solidFill>
+              </a:rPr>
+              <a:t>Diagrama de la clase</a:t>
+            </a:r>
+          </a:p>
+        </p:txBody>
+      </p:sp>
+      <p:pic>
+        <p:nvPicPr>
+          <p:cNvPr id="3" name="Picture 2" descr="66f0e0a1c2cd62fd.png"/>
+          <p:cNvPicPr>
+            <a:picLocks noChangeAspect="1"/>
+          </p:cNvPicPr>
+          <p:nvPr/>
+        </p:nvPicPr>
+        <p:blipFill>
+          <a:blip r:embed="rId2"/>
+          <a:stretch>
+            <a:fillRect/>
+          </a:stretch>
+        </p:blipFill>
+        <p:spPr>
+          <a:xfrm>
+            <a:off x="457200" y="3456432"/>
+            <a:ext cx="8229600" cy="585216"/>
+          </a:xfrm>
+          <a:prstGeom prst="rect">
+            <a:avLst/>
+          </a:prstGeom>
+        </p:spPr>
+      </p:pic>
     </p:spTree>
   </p:cSld>
   <p:clrMapOvr>
@@ -3713,7 +4239,7 @@
                   <a:srgbClr val="22282E"/>
                 </a:solidFill>
               </a:rPr>
-              <a:t>•  Comprender por qué el factor humano es el vector de ataque más explotado (phishing, ingeniería social, errores) y cómo construir un programa de concienciación y una cultura de seguridad que reduzca ese riesgo de forma medible. Al terminar sabrás diseñar campañas de formación, ejecutar simulaciones de phishing éticas, segmentar audiencias y medir el cambio de comportamiento, no solo la asistencia a un curso.</a:t>
+              <a:t>•  Comprender por qué el factor humano es el vector de ataque más explotado (phishing, ingeniería social, errores) y cómo construir un programa de concienciación y una cultura de seguridad que reduzca…</a:t>
             </a:r>
           </a:p>
         </p:txBody>
@@ -4107,7 +4633,7 @@
                   <a:srgbClr val="0B3D2E"/>
                 </a:solidFill>
               </a:rPr>
-              <a:t>📖 Definiciones y características</a:t>
+              <a:t>🧠 Explicación en profundidad</a:t>
             </a:r>
           </a:p>
         </p:txBody>
@@ -4145,97 +4671,22 @@
                   <a:srgbClr val="22282E"/>
                 </a:solidFill>
               </a:rPr>
-              <a:t>•  Concienciación (awareness): mantener la seguridad presente en la mente del usuario. Clave: cambia el foco de atención, es continua.</a:t>
-            </a:r>
-          </a:p>
-          <a:p>
-            <a:pPr>
-              <a:spcAft>
-                <a:spcPts val="600"/>
-              </a:spcAft>
-            </a:pPr>
-            <a:r>
-              <a:rPr sz="1500">
-                <a:solidFill>
-                  <a:srgbClr val="22282E"/>
-                </a:solidFill>
-              </a:rPr>
-              <a:t>•  Formación (training): enseñar habilidades concretas para un rol. Clave: orientada a tareas.</a:t>
-            </a:r>
-          </a:p>
-          <a:p>
-            <a:pPr>
-              <a:spcAft>
-                <a:spcPts val="600"/>
-              </a:spcAft>
-            </a:pPr>
-            <a:r>
-              <a:rPr sz="1500">
-                <a:solidFill>
-                  <a:srgbClr val="22282E"/>
-                </a:solidFill>
-              </a:rPr>
-              <a:t>•  Educación: conocimiento profundo y transferible. Clave: forma expertos, largo plazo.</a:t>
-            </a:r>
-          </a:p>
-          <a:p>
-            <a:pPr>
-              <a:spcAft>
-                <a:spcPts val="600"/>
-              </a:spcAft>
-            </a:pPr>
-            <a:r>
-              <a:rPr sz="1500">
-                <a:solidFill>
-                  <a:srgbClr val="22282E"/>
-                </a:solidFill>
-              </a:rPr>
-              <a:t>•  Simulación de phishing: envío controlado de correos señuelo para medir y entrenar. Clave: educar, no castigar.</a:t>
-            </a:r>
-          </a:p>
-          <a:p>
-            <a:pPr>
-              <a:spcAft>
-                <a:spcPts val="600"/>
-              </a:spcAft>
-            </a:pPr>
-            <a:r>
-              <a:rPr sz="1500">
-                <a:solidFill>
-                  <a:srgbClr val="22282E"/>
-                </a:solidFill>
-              </a:rPr>
-              <a:t>•  Tasa de clics (click rate): porcentaje que interactúa con el señuelo. Clave: baja con la práctica; métrica de partida.</a:t>
-            </a:r>
-          </a:p>
-          <a:p>
-            <a:pPr>
-              <a:spcAft>
-                <a:spcPts val="600"/>
-              </a:spcAft>
-            </a:pPr>
-            <a:r>
-              <a:rPr sz="1500">
-                <a:solidFill>
-                  <a:srgbClr val="22282E"/>
-                </a:solidFill>
-              </a:rPr>
-              <a:t>•  Tasa de reporte (report rate): porcentaje que denuncia el phishing. Clave: es la métrica que de verdad importa; que suba.</a:t>
-            </a:r>
-          </a:p>
-          <a:p>
-            <a:pPr>
-              <a:spcAft>
-                <a:spcPts val="600"/>
-              </a:spcAft>
-            </a:pPr>
-            <a:r>
-              <a:rPr sz="1500">
-                <a:solidFill>
-                  <a:srgbClr val="22282E"/>
-                </a:solidFill>
-              </a:rPr>
-              <a:t>•  Cultura de seguridad: valores y comportamientos compartidos respecto a la seguridad. Clave: se mide y se cultiva, no se impone.</a:t>
+              <a:t>•  Concienciación comunica; formación desarrolla habilidad; cultura se observa en decisiones e incentivos. Completar cursos no prueba que un proceso sea resistente. El programa parte de comportamientos…</a:t>
+            </a:r>
+          </a:p>
+          <a:p>
+            <a:pPr>
+              <a:spcAft>
+                <a:spcPts val="600"/>
+              </a:spcAft>
+            </a:pPr>
+            <a:r>
+              <a:rPr sz="1500">
+                <a:solidFill>
+                  <a:srgbClr val="22282E"/>
+                </a:solidFill>
+              </a:rPr>
+              <a:t>•  Sube la tasa de reporte tras simplificar el botón y mejorar respuesta del SOC. El resultado pertenece al sistema, no solo al curso.</a:t>
             </a:r>
           </a:p>
         </p:txBody>
@@ -4286,7 +4737,7 @@
                   <a:srgbClr val="0B3D2E"/>
                 </a:solidFill>
               </a:rPr>
-              <a:t>🧰 Herramientas y preparación</a:t>
+              <a:t>📔 Glosario operativo</a:t>
             </a:r>
           </a:p>
         </p:txBody>
@@ -4324,52 +4775,52 @@
                   <a:srgbClr val="22282E"/>
                 </a:solidFill>
               </a:rPr>
-              <a:t>•  Plataforma de simulación de phishing en laboratorio: GoPhish (open source, &lt;https://getgophish.com/&gt;), desplegado en un entorno de pruebas propio.</a:t>
-            </a:r>
-          </a:p>
-          <a:p>
-            <a:pPr>
-              <a:spcAft>
-                <a:spcPts val="600"/>
-              </a:spcAft>
-            </a:pPr>
-            <a:r>
-              <a:rPr sz="1500">
-                <a:solidFill>
-                  <a:srgbClr val="22282E"/>
-                </a:solidFill>
-              </a:rPr>
-              <a:t>•  Un servidor de correo de laboratorio o cuentas de prueba controladas (nunca envíes a terceros reales sin autorización).</a:t>
-            </a:r>
-          </a:p>
-          <a:p>
-            <a:pPr>
-              <a:spcAft>
-                <a:spcPts val="600"/>
-              </a:spcAft>
-            </a:pPr>
-            <a:r>
-              <a:rPr sz="1500">
-                <a:solidFill>
-                  <a:srgbClr val="22282E"/>
-                </a:solidFill>
-              </a:rPr>
-              <a:t>•  Material de concienciación de referencia: SANS Security Awareness, CISA y NIST SP 800-50/800-16.</a:t>
-            </a:r>
-          </a:p>
-          <a:p>
-            <a:pPr>
-              <a:spcAft>
-                <a:spcPts val="600"/>
-              </a:spcAft>
-            </a:pPr>
-            <a:r>
-              <a:rPr sz="1500">
-                <a:solidFill>
-                  <a:srgbClr val="22282E"/>
-                </a:solidFill>
-              </a:rPr>
-              <a:t>•  Hoja de cálculo para el plan de campañas y las métricas.</a:t>
+              <a:t>•  Término — Definición</a:t>
+            </a:r>
+          </a:p>
+          <a:p>
+            <a:pPr>
+              <a:spcAft>
+                <a:spcPts val="600"/>
+              </a:spcAft>
+            </a:pPr>
+            <a:r>
+              <a:rPr sz="1500">
+                <a:solidFill>
+                  <a:srgbClr val="22282E"/>
+                </a:solidFill>
+              </a:rPr>
+              <a:t>•  Conducta objetivo — Acción observable que reduce un escenario de riesgo.</a:t>
+            </a:r>
+          </a:p>
+          <a:p>
+            <a:pPr>
+              <a:spcAft>
+                <a:spcPts val="600"/>
+              </a:spcAft>
+            </a:pPr>
+            <a:r>
+              <a:rPr sz="1500">
+                <a:solidFill>
+                  <a:srgbClr val="22282E"/>
+                </a:solidFill>
+              </a:rPr>
+              <a:t>•  Intervención — Cambio educativo, técnico o de proceso.</a:t>
+            </a:r>
+          </a:p>
+          <a:p>
+            <a:pPr>
+              <a:spcAft>
+                <a:spcPts val="600"/>
+              </a:spcAft>
+            </a:pPr>
+            <a:r>
+              <a:rPr sz="1500">
+                <a:solidFill>
+                  <a:srgbClr val="22282E"/>
+                </a:solidFill>
+              </a:rPr>
+              <a:t>•  Seguridad psicológica — Capacidad de informar errores y dudas tempranamente.</a:t>
             </a:r>
           </a:p>
         </p:txBody>
@@ -4420,7 +4871,7 @@
                   <a:srgbClr val="0B3D2E"/>
                 </a:solidFill>
               </a:rPr>
-              <a:t>🧪 Laboratorio guiado (ejercicio aplicado)</a:t>
+              <a:t>✅ Criterio de dominio</a:t>
             </a:r>
           </a:p>
         </p:txBody>
@@ -4458,97 +4909,7 @@
                   <a:srgbClr val="22282E"/>
                 </a:solidFill>
               </a:rPr>
-              <a:t>•  Parte A — Programa de concienciación para "Ferretería del Sur S.A.":</a:t>
-            </a:r>
-          </a:p>
-          <a:p>
-            <a:pPr>
-              <a:spcAft>
-                <a:spcPts val="600"/>
-              </a:spcAft>
-            </a:pPr>
-            <a:r>
-              <a:rPr sz="1500">
-                <a:solidFill>
-                  <a:srgbClr val="22282E"/>
-                </a:solidFill>
-              </a:rPr>
-              <a:t>•  Segmentación: define 3 audiencias (personal general, desarrolladores, finanzas) y el riesgo principal de cada una (phishing genérico, seguridad en el código, fraude del CEO/BEC).</a:t>
-            </a:r>
-          </a:p>
-          <a:p>
-            <a:pPr>
-              <a:spcAft>
-                <a:spcPts val="600"/>
-              </a:spcAft>
-            </a:pPr>
-            <a:r>
-              <a:rPr sz="1500">
-                <a:solidFill>
-                  <a:srgbClr val="22282E"/>
-                </a:solidFill>
-              </a:rPr>
-              <a:t>•  Plan anual: crea un calendario de 12 meses con temas mensuales (contraseñas, phishing, datos personales, escritorio limpio, incidentes) y formato (píldora, taller, cartel, simulación).</a:t>
-            </a:r>
-          </a:p>
-          <a:p>
-            <a:pPr>
-              <a:spcAft>
-                <a:spcPts val="600"/>
-              </a:spcAft>
-            </a:pPr>
-            <a:r>
-              <a:rPr sz="1500">
-                <a:solidFill>
-                  <a:srgbClr val="22282E"/>
-                </a:solidFill>
-              </a:rPr>
-              <a:t>•  Contenido: redacta el guion de una píldora de 5 minutos sobre cómo reconocer un correo de phishing (remitente, urgencia, enlaces, adjuntos).</a:t>
-            </a:r>
-          </a:p>
-          <a:p>
-            <a:pPr>
-              <a:spcAft>
-                <a:spcPts val="600"/>
-              </a:spcAft>
-            </a:pPr>
-            <a:r>
-              <a:rPr sz="1500">
-                <a:solidFill>
-                  <a:srgbClr val="22282E"/>
-                </a:solidFill>
-              </a:rPr>
-              <a:t>•  Parte B — Simulación de phishing ética (laboratorio con GoPhish):</a:t>
-            </a:r>
-          </a:p>
-          <a:p>
-            <a:pPr>
-              <a:spcAft>
-                <a:spcPts val="600"/>
-              </a:spcAft>
-            </a:pPr>
-            <a:r>
-              <a:rPr sz="1500">
-                <a:solidFill>
-                  <a:srgbClr val="22282E"/>
-                </a:solidFill>
-              </a:rPr>
-              <a:t>•  Despliega GoPhish en tu VM de laboratorio y crea una campaña con: plantilla de correo señuelo, landing page de formación y grupo de "empleados de prueba" (cuentas propias).</a:t>
-            </a:r>
-          </a:p>
-          <a:p>
-            <a:pPr>
-              <a:spcAft>
-                <a:spcPts val="600"/>
-              </a:spcAft>
-            </a:pPr>
-            <a:r>
-              <a:rPr sz="1500">
-                <a:solidFill>
-                  <a:srgbClr val="22282E"/>
-                </a:solidFill>
-              </a:rPr>
-              <a:t>•  Lanza la campaña contra tus cuentas de prueba y observa las métricas: enviados, abiertos, clics, datos enviados.</a:t>
+              <a:t>•  Hay dominio cuando el alumno diseña aprendizaje contextual, protección de participantes y métricas de resultado.</a:t>
             </a:r>
           </a:p>
         </p:txBody>
@@ -4599,7 +4960,7 @@
                   <a:srgbClr val="0B3D2E"/>
                 </a:solidFill>
               </a:rPr>
-              <a:t>✍️ Ejercicios</a:t>
+              <a:t>📖 Definiciones y características</a:t>
             </a:r>
           </a:p>
         </p:txBody>
@@ -4637,82 +4998,97 @@
                   <a:srgbClr val="22282E"/>
                 </a:solidFill>
               </a:rPr>
-              <a:t>•  Diferencia con ejemplos concienciación, formación y educación.</a:t>
-            </a:r>
-          </a:p>
-          <a:p>
-            <a:pPr>
-              <a:spcAft>
-                <a:spcPts val="600"/>
-              </a:spcAft>
-            </a:pPr>
-            <a:r>
-              <a:rPr sz="1500">
-                <a:solidFill>
-                  <a:srgbClr val="22282E"/>
-                </a:solidFill>
-              </a:rPr>
-              <a:t>•  Diseña 3 señuelos de phishing de dificultad creciente (bajo, medio, dirigido/spear).</a:t>
-            </a:r>
-          </a:p>
-          <a:p>
-            <a:pPr>
-              <a:spcAft>
-                <a:spcPts val="600"/>
-              </a:spcAft>
-            </a:pPr>
-            <a:r>
-              <a:rPr sz="1500">
-                <a:solidFill>
-                  <a:srgbClr val="22282E"/>
-                </a:solidFill>
-              </a:rPr>
-              <a:t>•  Explica por qué la tasa de reporte importa más que la de clics.</a:t>
-            </a:r>
-          </a:p>
-          <a:p>
-            <a:pPr>
-              <a:spcAft>
-                <a:spcPts val="600"/>
-              </a:spcAft>
-            </a:pPr>
-            <a:r>
-              <a:rPr sz="1500">
-                <a:solidFill>
-                  <a:srgbClr val="22282E"/>
-                </a:solidFill>
-              </a:rPr>
-              <a:t>•  Propón cómo formarías específicamente al equipo de finanzas contra el fraude BEC.</a:t>
-            </a:r>
-          </a:p>
-          <a:p>
-            <a:pPr>
-              <a:spcAft>
-                <a:spcPts val="600"/>
-              </a:spcAft>
-            </a:pPr>
-            <a:r>
-              <a:rPr sz="1500">
-                <a:solidFill>
-                  <a:srgbClr val="22282E"/>
-                </a:solidFill>
-              </a:rPr>
-              <a:t>•  Un empleado picó en la simulación. Redacta el mensaje que le enviarías sin culpabilizarlo.</a:t>
-            </a:r>
-          </a:p>
-          <a:p>
-            <a:pPr>
-              <a:spcAft>
-                <a:spcPts val="600"/>
-              </a:spcAft>
-            </a:pPr>
-            <a:r>
-              <a:rPr sz="1500">
-                <a:solidFill>
-                  <a:srgbClr val="22282E"/>
-                </a:solidFill>
-              </a:rPr>
-              <a:t>•  Define 3 indicadores para medir la madurez de la cultura de seguridad.</a:t>
+              <a:t>•  Concienciación (awareness): mantener la seguridad presente en la mente del usuario. Clave: cambia el foco de atención, es continua.</a:t>
+            </a:r>
+          </a:p>
+          <a:p>
+            <a:pPr>
+              <a:spcAft>
+                <a:spcPts val="600"/>
+              </a:spcAft>
+            </a:pPr>
+            <a:r>
+              <a:rPr sz="1500">
+                <a:solidFill>
+                  <a:srgbClr val="22282E"/>
+                </a:solidFill>
+              </a:rPr>
+              <a:t>•  Formación (training): enseñar habilidades concretas para un rol. Clave: orientada a tareas.</a:t>
+            </a:r>
+          </a:p>
+          <a:p>
+            <a:pPr>
+              <a:spcAft>
+                <a:spcPts val="600"/>
+              </a:spcAft>
+            </a:pPr>
+            <a:r>
+              <a:rPr sz="1500">
+                <a:solidFill>
+                  <a:srgbClr val="22282E"/>
+                </a:solidFill>
+              </a:rPr>
+              <a:t>•  Educación: conocimiento profundo y transferible. Clave: forma expertos, largo plazo.</a:t>
+            </a:r>
+          </a:p>
+          <a:p>
+            <a:pPr>
+              <a:spcAft>
+                <a:spcPts val="600"/>
+              </a:spcAft>
+            </a:pPr>
+            <a:r>
+              <a:rPr sz="1500">
+                <a:solidFill>
+                  <a:srgbClr val="22282E"/>
+                </a:solidFill>
+              </a:rPr>
+              <a:t>•  Simulación de phishing: envío controlado de correos señuelo para medir y entrenar. Clave: educar, no castigar.</a:t>
+            </a:r>
+          </a:p>
+          <a:p>
+            <a:pPr>
+              <a:spcAft>
+                <a:spcPts val="600"/>
+              </a:spcAft>
+            </a:pPr>
+            <a:r>
+              <a:rPr sz="1500">
+                <a:solidFill>
+                  <a:srgbClr val="22282E"/>
+                </a:solidFill>
+              </a:rPr>
+              <a:t>•  Tasa de clics (click rate): porcentaje que interactúa con el señuelo. Clave: baja con la práctica; métrica de partida.</a:t>
+            </a:r>
+          </a:p>
+          <a:p>
+            <a:pPr>
+              <a:spcAft>
+                <a:spcPts val="600"/>
+              </a:spcAft>
+            </a:pPr>
+            <a:r>
+              <a:rPr sz="1500">
+                <a:solidFill>
+                  <a:srgbClr val="22282E"/>
+                </a:solidFill>
+              </a:rPr>
+              <a:t>•  Tasa de reporte (report rate): porcentaje que denuncia el phishing. Clave: es la métrica que de verdad importa; que suba.</a:t>
+            </a:r>
+          </a:p>
+          <a:p>
+            <a:pPr>
+              <a:spcAft>
+                <a:spcPts val="600"/>
+              </a:spcAft>
+            </a:pPr>
+            <a:r>
+              <a:rPr sz="1500">
+                <a:solidFill>
+                  <a:srgbClr val="22282E"/>
+                </a:solidFill>
+              </a:rPr>
+              <a:t>•  Cultura de seguridad: valores y comportamientos compartidos respecto a la seguridad. Clave: se mide y se cultiva, no se impone.</a:t>
             </a:r>
           </a:p>
         </p:txBody>
@@ -4763,7 +5139,7 @@
                   <a:srgbClr val="0B3D2E"/>
                 </a:solidFill>
               </a:rPr>
-              <a:t>📝 Reto verificable</a:t>
+              <a:t>🧰 Herramientas y preparación</a:t>
             </a:r>
           </a:p>
         </p:txBody>
@@ -4801,22 +5177,52 @@
                   <a:srgbClr val="22282E"/>
                 </a:solidFill>
               </a:rPr>
-              <a:t>•  Entrega un programa de concienciación con: segmentación por 3 audiencias, calendario anual de temas, una simulación de phishing ejecutada en laboratorio (GoPhish) con métricas de clic y reporte, y la página educativa post-clic.</a:t>
-            </a:r>
-          </a:p>
-          <a:p>
-            <a:pPr>
-              <a:spcAft>
-                <a:spcPts val="600"/>
-              </a:spcAft>
-            </a:pPr>
-            <a:r>
-              <a:rPr sz="1500">
-                <a:solidFill>
-                  <a:srgbClr val="22282E"/>
-                </a:solidFill>
-              </a:rPr>
-              <a:t>•  Criterio de aceptación: la campaña se ejecutó solo sobre cuentas de prueba propias, se registran tasas de clic y reporte iniciales con un objetivo de mejora, y el material educativo refuerza sin culpabilizar.</a:t>
+              <a:t>•  Plataforma de simulación de phishing en laboratorio: GoPhish (open source, &lt;https://getgophish.com/&gt;), desplegado en un entorno de pruebas propio.</a:t>
+            </a:r>
+          </a:p>
+          <a:p>
+            <a:pPr>
+              <a:spcAft>
+                <a:spcPts val="600"/>
+              </a:spcAft>
+            </a:pPr>
+            <a:r>
+              <a:rPr sz="1500">
+                <a:solidFill>
+                  <a:srgbClr val="22282E"/>
+                </a:solidFill>
+              </a:rPr>
+              <a:t>•  Un servidor de correo de laboratorio o cuentas de prueba controladas (nunca envíes a terceros reales sin autorización).</a:t>
+            </a:r>
+          </a:p>
+          <a:p>
+            <a:pPr>
+              <a:spcAft>
+                <a:spcPts val="600"/>
+              </a:spcAft>
+            </a:pPr>
+            <a:r>
+              <a:rPr sz="1500">
+                <a:solidFill>
+                  <a:srgbClr val="22282E"/>
+                </a:solidFill>
+              </a:rPr>
+              <a:t>•  Material de concienciación de referencia: SANS Security Awareness, CISA y NIST SP 800-50/800-16.</a:t>
+            </a:r>
+          </a:p>
+          <a:p>
+            <a:pPr>
+              <a:spcAft>
+                <a:spcPts val="600"/>
+              </a:spcAft>
+            </a:pPr>
+            <a:r>
+              <a:rPr sz="1500">
+                <a:solidFill>
+                  <a:srgbClr val="22282E"/>
+                </a:solidFill>
+              </a:rPr>
+              <a:t>•  Hoja de cálculo para el plan de campañas y las métricas.</a:t>
             </a:r>
           </a:p>
         </p:txBody>
